--- a/LOIPL_Chatbot_Architecture.pptx
+++ b/LOIPL_Chatbot_Architecture.pptx
@@ -1536,7 +1536,7 @@
                 <a:ea typeface="Arial" pitchFamily="34" charset="-122"/>
                 <a:cs typeface="Arial" pitchFamily="34" charset="-120"/>
               </a:rPr>
-              <a:t>Architecture Overview MAX AI CHATBOT</a:t>
+              <a:t>Architecture Overview</a:t>
             </a:r>
             <a:endParaRPr lang="en-US" sz="2400" dirty="0"/>
           </a:p>
@@ -2981,61 +2981,6 @@
       </p:sp>
       <p:sp>
         <p:nvSpPr>
-          <p:cNvPr id="40" name="Shape GoldBox"/>
-          <p:cNvSpPr/>
-          <p:nvPr/>
-        </p:nvSpPr>
-        <p:spPr>
-          <a:xfrm>
-            <a:off x="457200" y="3750000"/>
-            <a:ext cx="8229600" cy="300000"/>
-          </a:xfrm>
-          <a:prstGeom prst="rect">
-            <a:avLst/>
-          </a:prstGeom>
-          <a:solidFill>
-            <a:srgbClr val="000000">
-              <a:alpha val="0"/>
-            </a:srgbClr>
-          </a:solidFill>
-          <a:ln w="19050">
-            <a:solidFill>
-              <a:srgbClr val="D1AC88"/>
-            </a:solidFill>
-            <a:prstDash val="solid"/>
-          </a:ln>
-        </p:spPr>
-        <p:txBody>
-          <a:bodyPr wrap="square" rtlCol="0" anchor="ctr"/>
-          <a:lstStyle/>
-          <a:p>
-            <a:pPr marL="0" indent="0" algn="ctr">
-              <a:buNone/>
-            </a:pPr>
-            <a:r>
-              <a:rPr lang="en-US" sz="1300" b="0" i="1" dirty="0">
-                <a:latin typeface="Arial" pitchFamily="34" charset="0"/>
-                <a:ea typeface="Arial" pitchFamily="34" charset="-122"/>
-                <a:cs typeface="Arial" pitchFamily="34" charset="-120"/>
-              </a:rPr>
-              <a:t>No platform fees. No per-seat charges. Pay only </a:t>
-            </a:r>
-            <a:r>
-              <a:rPr lang="en-US" sz="1300" b="0" i="1" dirty="0">
-                <a:solidFill>
-                  <a:srgbClr val="FFFFFF"/>
-                </a:solidFill>
-                <a:latin typeface="Arial" pitchFamily="34" charset="0"/>
-                <a:ea typeface="Arial" pitchFamily="34" charset="-122"/>
-                <a:cs typeface="Arial" pitchFamily="34" charset="-120"/>
-              </a:rPr>
-              <a:t>for tokens used.</a:t>
-            </a:r>
-          </a:p>
-        </p:txBody>
-      </p:sp>
-      <p:sp>
-        <p:nvSpPr>
           <p:cNvPr id="50" name="Text SlideNum"/>
           <p:cNvSpPr/>
           <p:nvPr/>
@@ -3072,6 +3017,66 @@
           </a:p>
         </p:txBody>
       </p:sp>
+      <p:pic>
+        <p:nvPicPr>
+          <p:cNvPr id="7" name="Picture 6">
+            <a:extLst>
+              <a:ext uri="{FF2B5EF4-FFF2-40B4-BE49-F238E27FC236}">
+                <a16:creationId xmlns:a16="http://schemas.microsoft.com/office/drawing/2014/main" id="{7AFFD297-6B85-3875-0F96-1F0AA9477ABC}"/>
+              </a:ext>
+            </a:extLst>
+          </p:cNvPr>
+          <p:cNvPicPr>
+            <a:picLocks noChangeAspect="1"/>
+          </p:cNvPicPr>
+          <p:nvPr/>
+        </p:nvPicPr>
+        <p:blipFill>
+          <a:blip r:embed="rId3"/>
+          <a:stretch>
+            <a:fillRect/>
+          </a:stretch>
+        </p:blipFill>
+        <p:spPr>
+          <a:xfrm>
+            <a:off x="7795562" y="4084657"/>
+            <a:ext cx="1252124" cy="1058843"/>
+          </a:xfrm>
+          <a:prstGeom prst="rect">
+            <a:avLst/>
+          </a:prstGeom>
+        </p:spPr>
+      </p:pic>
+      <p:pic>
+        <p:nvPicPr>
+          <p:cNvPr id="8" name="Picture 7">
+            <a:extLst>
+              <a:ext uri="{FF2B5EF4-FFF2-40B4-BE49-F238E27FC236}">
+                <a16:creationId xmlns:a16="http://schemas.microsoft.com/office/drawing/2014/main" id="{D3773FDF-3E92-9390-B519-9D9C6D5099DF}"/>
+              </a:ext>
+            </a:extLst>
+          </p:cNvPr>
+          <p:cNvPicPr>
+            <a:picLocks noChangeAspect="1"/>
+          </p:cNvPicPr>
+          <p:nvPr/>
+        </p:nvPicPr>
+        <p:blipFill>
+          <a:blip r:embed="rId3"/>
+          <a:stretch>
+            <a:fillRect/>
+          </a:stretch>
+        </p:blipFill>
+        <p:spPr>
+          <a:xfrm>
+            <a:off x="7832138" y="4029521"/>
+            <a:ext cx="1252124" cy="1058843"/>
+          </a:xfrm>
+          <a:prstGeom prst="rect">
+            <a:avLst/>
+          </a:prstGeom>
+        </p:spPr>
+      </p:pic>
     </p:spTree>
   </p:cSld>
   <p:clrMapOvr>
@@ -4559,28 +4564,28 @@
           <p:nvPr>
             <p:extLst>
               <p:ext uri="{D42A27DB-BD31-4B8C-83A1-F6EECF244321}">
-                <p14:modId xmlns:p14="http://schemas.microsoft.com/office/powerpoint/2010/main" val="1579011935"/>
+                <p14:modId xmlns:p14="http://schemas.microsoft.com/office/powerpoint/2010/main" val="124299329"/>
               </p:ext>
             </p:extLst>
           </p:nvPr>
         </p:nvGraphicFramePr>
         <p:xfrm>
           <a:off x="457200" y="1005840"/>
-          <a:ext cx="8229600" cy="3328416"/>
+          <a:ext cx="7489528" cy="2849112"/>
         </p:xfrm>
         <a:graphic>
           <a:graphicData uri="http://schemas.openxmlformats.org/drawingml/2006/table">
             <a:tbl>
               <a:tblPr/>
               <a:tblGrid>
-                <a:gridCol w="2286000">
+                <a:gridCol w="2080424">
                   <a:extLst>
                     <a:ext uri="{9D8B030D-6E8A-4147-A177-3AD203B41FA5}">
                       <a16:colId xmlns:a16="http://schemas.microsoft.com/office/drawing/2014/main" val="20000"/>
                     </a:ext>
                   </a:extLst>
                 </a:gridCol>
-                <a:gridCol w="5943600">
+                <a:gridCol w="5409104">
                   <a:extLst>
                     <a:ext uri="{9D8B030D-6E8A-4147-A177-3AD203B41FA5}">
                       <a16:colId xmlns:a16="http://schemas.microsoft.com/office/drawing/2014/main" val="20001"/>
@@ -4588,7 +4593,7 @@
                   </a:extLst>
                 </a:gridCol>
               </a:tblGrid>
-              <a:tr h="475488">
+              <a:tr h="407016">
                 <a:tc>
                   <a:txBody>
                     <a:bodyPr/>
@@ -4731,7 +4736,7 @@
                   </a:ext>
                 </a:extLst>
               </a:tr>
-              <a:tr h="475488">
+              <a:tr h="407016">
                 <a:tc>
                   <a:txBody>
                     <a:bodyPr/>
@@ -4874,7 +4879,7 @@
                   </a:ext>
                 </a:extLst>
               </a:tr>
-              <a:tr h="475488">
+              <a:tr h="407016">
                 <a:tc>
                   <a:txBody>
                     <a:bodyPr/>
@@ -5017,7 +5022,7 @@
                   </a:ext>
                 </a:extLst>
               </a:tr>
-              <a:tr h="475488">
+              <a:tr h="407016">
                 <a:tc>
                   <a:txBody>
                     <a:bodyPr/>
@@ -5160,7 +5165,7 @@
                   </a:ext>
                 </a:extLst>
               </a:tr>
-              <a:tr h="475488">
+              <a:tr h="407016">
                 <a:tc>
                   <a:txBody>
                     <a:bodyPr/>
@@ -5303,7 +5308,7 @@
                   </a:ext>
                 </a:extLst>
               </a:tr>
-              <a:tr h="475488">
+              <a:tr h="407016">
                 <a:tc>
                   <a:txBody>
                     <a:bodyPr/>
@@ -5446,7 +5451,7 @@
                   </a:ext>
                 </a:extLst>
               </a:tr>
-              <a:tr h="475488">
+              <a:tr h="407016">
                 <a:tc>
                   <a:txBody>
                     <a:bodyPr/>
@@ -5662,6 +5667,36 @@
           </a:prstGeom>
         </p:spPr>
       </p:pic>
+      <p:pic>
+        <p:nvPicPr>
+          <p:cNvPr id="7" name="Picture 6">
+            <a:extLst>
+              <a:ext uri="{FF2B5EF4-FFF2-40B4-BE49-F238E27FC236}">
+                <a16:creationId xmlns:a16="http://schemas.microsoft.com/office/drawing/2014/main" id="{919590EB-44B3-B95F-875D-7F778C465D0A}"/>
+              </a:ext>
+            </a:extLst>
+          </p:cNvPr>
+          <p:cNvPicPr>
+            <a:picLocks noChangeAspect="1"/>
+          </p:cNvPicPr>
+          <p:nvPr/>
+        </p:nvPicPr>
+        <p:blipFill>
+          <a:blip r:embed="rId3"/>
+          <a:stretch>
+            <a:fillRect/>
+          </a:stretch>
+        </p:blipFill>
+        <p:spPr>
+          <a:xfrm>
+            <a:off x="7795562" y="4084657"/>
+            <a:ext cx="1252124" cy="1058843"/>
+          </a:xfrm>
+          <a:prstGeom prst="rect">
+            <a:avLst/>
+          </a:prstGeom>
+        </p:spPr>
+      </p:pic>
     </p:spTree>
   </p:cSld>
   <p:clrMapOvr>
@@ -7408,7 +7443,7 @@
         <p:spPr>
           <a:xfrm>
             <a:off x="274320" y="1005840"/>
-            <a:ext cx="4023360" cy="3749040"/>
+            <a:ext cx="4023360" cy="2755455"/>
           </a:xfrm>
           <a:prstGeom prst="rect">
             <a:avLst/>
@@ -7636,7 +7671,7 @@
         <p:spPr>
           <a:xfrm>
             <a:off x="4846320" y="1005840"/>
-            <a:ext cx="4023360" cy="3749040"/>
+            <a:ext cx="4023360" cy="2755455"/>
           </a:xfrm>
           <a:prstGeom prst="rect">
             <a:avLst/>
@@ -7894,6 +7929,36 @@
           </a:p>
         </p:txBody>
       </p:sp>
+      <p:pic>
+        <p:nvPicPr>
+          <p:cNvPr id="13" name="Picture 12">
+            <a:extLst>
+              <a:ext uri="{FF2B5EF4-FFF2-40B4-BE49-F238E27FC236}">
+                <a16:creationId xmlns:a16="http://schemas.microsoft.com/office/drawing/2014/main" id="{241EB75B-BB1F-DF08-B49E-4A10026C344D}"/>
+              </a:ext>
+            </a:extLst>
+          </p:cNvPr>
+          <p:cNvPicPr>
+            <a:picLocks noChangeAspect="1"/>
+          </p:cNvPicPr>
+          <p:nvPr/>
+        </p:nvPicPr>
+        <p:blipFill>
+          <a:blip r:embed="rId3"/>
+          <a:stretch>
+            <a:fillRect/>
+          </a:stretch>
+        </p:blipFill>
+        <p:spPr>
+          <a:xfrm>
+            <a:off x="7786418" y="4027932"/>
+            <a:ext cx="1252124" cy="1058843"/>
+          </a:xfrm>
+          <a:prstGeom prst="rect">
+            <a:avLst/>
+          </a:prstGeom>
+        </p:spPr>
+      </p:pic>
     </p:spTree>
   </p:cSld>
   <p:clrMapOvr>
@@ -8007,35 +8072,35 @@
           <p:nvPr>
             <p:extLst>
               <p:ext uri="{D42A27DB-BD31-4B8C-83A1-F6EECF244321}">
-                <p14:modId xmlns:p14="http://schemas.microsoft.com/office/powerpoint/2010/main" val="554243950"/>
+                <p14:modId xmlns:p14="http://schemas.microsoft.com/office/powerpoint/2010/main" val="436162268"/>
               </p:ext>
             </p:extLst>
           </p:nvPr>
         </p:nvGraphicFramePr>
         <p:xfrm>
           <a:off x="365760" y="868680"/>
-          <a:ext cx="8412480" cy="3584448"/>
+          <a:ext cx="7807278" cy="2979718"/>
         </p:xfrm>
         <a:graphic>
           <a:graphicData uri="http://schemas.openxmlformats.org/drawingml/2006/table">
             <a:tbl>
               <a:tblPr/>
               <a:tblGrid>
-                <a:gridCol w="2011680">
+                <a:gridCol w="1866958">
                   <a:extLst>
                     <a:ext uri="{9D8B030D-6E8A-4147-A177-3AD203B41FA5}">
                       <a16:colId xmlns:a16="http://schemas.microsoft.com/office/drawing/2014/main" val="20000"/>
                     </a:ext>
                   </a:extLst>
                 </a:gridCol>
-                <a:gridCol w="3200400">
+                <a:gridCol w="2970160">
                   <a:extLst>
                     <a:ext uri="{9D8B030D-6E8A-4147-A177-3AD203B41FA5}">
                       <a16:colId xmlns:a16="http://schemas.microsoft.com/office/drawing/2014/main" val="20001"/>
                     </a:ext>
                   </a:extLst>
                 </a:gridCol>
-                <a:gridCol w="3200400">
+                <a:gridCol w="2970160">
                   <a:extLst>
                     <a:ext uri="{9D8B030D-6E8A-4147-A177-3AD203B41FA5}">
                       <a16:colId xmlns:a16="http://schemas.microsoft.com/office/drawing/2014/main" val="20002"/>
@@ -8043,7 +8108,7 @@
                   </a:extLst>
                 </a:gridCol>
               </a:tblGrid>
-              <a:tr h="512064">
+              <a:tr h="425674">
                 <a:tc>
                   <a:txBody>
                     <a:bodyPr/>
@@ -8254,7 +8319,7 @@
                   </a:ext>
                 </a:extLst>
               </a:tr>
-              <a:tr h="512064">
+              <a:tr h="425674">
                 <a:tc>
                   <a:txBody>
                     <a:bodyPr/>
@@ -8465,7 +8530,7 @@
                   </a:ext>
                 </a:extLst>
               </a:tr>
-              <a:tr h="512064">
+              <a:tr h="425674">
                 <a:tc>
                   <a:txBody>
                     <a:bodyPr/>
@@ -8676,7 +8741,7 @@
                   </a:ext>
                 </a:extLst>
               </a:tr>
-              <a:tr h="512064">
+              <a:tr h="425674">
                 <a:tc>
                   <a:txBody>
                     <a:bodyPr/>
@@ -8909,7 +8974,7 @@
                   </a:ext>
                 </a:extLst>
               </a:tr>
-              <a:tr h="512064">
+              <a:tr h="425674">
                 <a:tc>
                   <a:txBody>
                     <a:bodyPr/>
@@ -9120,7 +9185,7 @@
                   </a:ext>
                 </a:extLst>
               </a:tr>
-              <a:tr h="512064">
+              <a:tr h="425674">
                 <a:tc>
                   <a:txBody>
                     <a:bodyPr/>
@@ -9331,7 +9396,7 @@
                   </a:ext>
                 </a:extLst>
               </a:tr>
-              <a:tr h="512064">
+              <a:tr h="425674">
                 <a:tc>
                   <a:txBody>
                     <a:bodyPr/>
@@ -9585,6 +9650,36 @@
           </a:p>
         </p:txBody>
       </p:sp>
+      <p:pic>
+        <p:nvPicPr>
+          <p:cNvPr id="4" name="Picture 3">
+            <a:extLst>
+              <a:ext uri="{FF2B5EF4-FFF2-40B4-BE49-F238E27FC236}">
+                <a16:creationId xmlns:a16="http://schemas.microsoft.com/office/drawing/2014/main" id="{5470AA46-A009-0198-847B-FCAF5B7645E2}"/>
+              </a:ext>
+            </a:extLst>
+          </p:cNvPr>
+          <p:cNvPicPr>
+            <a:picLocks noChangeAspect="1"/>
+          </p:cNvPicPr>
+          <p:nvPr/>
+        </p:nvPicPr>
+        <p:blipFill>
+          <a:blip r:embed="rId3"/>
+          <a:stretch>
+            <a:fillRect/>
+          </a:stretch>
+        </p:blipFill>
+        <p:spPr>
+          <a:xfrm>
+            <a:off x="7682845" y="3989339"/>
+            <a:ext cx="1364841" cy="1154161"/>
+          </a:xfrm>
+          <a:prstGeom prst="rect">
+            <a:avLst/>
+          </a:prstGeom>
+        </p:spPr>
+      </p:pic>
     </p:spTree>
   </p:cSld>
   <p:clrMapOvr>
@@ -9737,7 +9832,7 @@
         <p:spPr>
           <a:xfrm>
             <a:off x="457200" y="1133856"/>
-            <a:ext cx="8229600" cy="1280160"/>
+            <a:ext cx="8229600" cy="996696"/>
           </a:xfrm>
           <a:prstGeom prst="rect">
             <a:avLst/>
@@ -9757,7 +9852,7 @@
               <a:buChar char="▸"/>
             </a:pPr>
             <a:r>
-              <a:rPr lang="en-US" sz="1300" dirty="0">
+              <a:rPr lang="en-US" sz="1100" dirty="0">
                 <a:solidFill>
                   <a:srgbClr val="000000"/>
                 </a:solidFill>
@@ -9767,7 +9862,7 @@
               </a:rPr>
               <a:t>Create DTO (response shape)</a:t>
             </a:r>
-            <a:endParaRPr lang="en-US" sz="1300" dirty="0"/>
+            <a:endParaRPr lang="en-US" sz="1100" dirty="0"/>
           </a:p>
           <a:p>
             <a:pPr marL="342900" indent="-342900">
@@ -9778,7 +9873,7 @@
               <a:buChar char="▸"/>
             </a:pPr>
             <a:r>
-              <a:rPr lang="en-US" sz="1300" dirty="0">
+              <a:rPr lang="en-US" sz="1100" dirty="0">
                 <a:solidFill>
                   <a:srgbClr val="000000"/>
                 </a:solidFill>
@@ -9788,7 +9883,7 @@
               </a:rPr>
               <a:t>Create Tool — API caller with @Tool annotation</a:t>
             </a:r>
-            <a:endParaRPr lang="en-US" sz="1300" dirty="0"/>
+            <a:endParaRPr lang="en-US" sz="1100" dirty="0"/>
           </a:p>
           <a:p>
             <a:pPr marL="342900" indent="-342900">
@@ -9799,7 +9894,7 @@
               <a:buChar char="▸"/>
             </a:pPr>
             <a:r>
-              <a:rPr lang="en-US" sz="1300" dirty="0">
+              <a:rPr lang="en-US" sz="1100" dirty="0">
                 <a:solidFill>
                   <a:srgbClr val="000000"/>
                 </a:solidFill>
@@ -9809,7 +9904,7 @@
               </a:rPr>
               <a:t>Create Intent Handler — @Component implements IntentHandler</a:t>
             </a:r>
-            <a:endParaRPr lang="en-US" sz="1300" dirty="0"/>
+            <a:endParaRPr lang="en-US" sz="1100" dirty="0"/>
           </a:p>
           <a:p>
             <a:pPr marL="342900" indent="-342900">
@@ -9820,7 +9915,7 @@
               <a:buChar char="▸"/>
             </a:pPr>
             <a:r>
-              <a:rPr lang="en-US" sz="1300" dirty="0">
+              <a:rPr lang="en-US" sz="1100" dirty="0">
                 <a:solidFill>
                   <a:srgbClr val="000000"/>
                 </a:solidFill>
@@ -9830,7 +9925,7 @@
               </a:rPr>
               <a:t>Add one bullet to Intent Classifier prompt</a:t>
             </a:r>
-            <a:endParaRPr lang="en-US" sz="1300" dirty="0"/>
+            <a:endParaRPr lang="en-US" sz="1100" dirty="0"/>
           </a:p>
           <a:p>
             <a:pPr marL="342900" indent="-342900">
@@ -9841,7 +9936,7 @@
               <a:buChar char="▸"/>
             </a:pPr>
             <a:r>
-              <a:rPr lang="en-US" sz="1300" dirty="0">
+              <a:rPr lang="en-US" sz="1100" dirty="0">
                 <a:solidFill>
                   <a:srgbClr val="000000"/>
                 </a:solidFill>
@@ -9851,7 +9946,7 @@
               </a:rPr>
               <a:t>Spring auto-discovers — zero manual wiring</a:t>
             </a:r>
-            <a:endParaRPr lang="en-US" sz="1300" dirty="0"/>
+            <a:endParaRPr lang="en-US" sz="1100" dirty="0"/>
           </a:p>
         </p:txBody>
       </p:sp>
@@ -9864,28 +9959,28 @@
           <p:nvPr>
             <p:extLst>
               <p:ext uri="{D42A27DB-BD31-4B8C-83A1-F6EECF244321}">
-                <p14:modId xmlns:p14="http://schemas.microsoft.com/office/powerpoint/2010/main" val="1579011935"/>
+                <p14:modId xmlns:p14="http://schemas.microsoft.com/office/powerpoint/2010/main" val="1266270100"/>
               </p:ext>
             </p:extLst>
           </p:nvPr>
         </p:nvGraphicFramePr>
         <p:xfrm>
           <a:off x="457200" y="2487168"/>
-          <a:ext cx="8229600" cy="2414016"/>
+          <a:ext cx="7844763" cy="1605560"/>
         </p:xfrm>
         <a:graphic>
           <a:graphicData uri="http://schemas.openxmlformats.org/drawingml/2006/table">
             <a:tbl>
               <a:tblPr/>
               <a:tblGrid>
-                <a:gridCol w="2011680">
+                <a:gridCol w="1917609">
                   <a:extLst>
                     <a:ext uri="{9D8B030D-6E8A-4147-A177-3AD203B41FA5}">
                       <a16:colId xmlns:a16="http://schemas.microsoft.com/office/drawing/2014/main" val="20000"/>
                     </a:ext>
                   </a:extLst>
                 </a:gridCol>
-                <a:gridCol w="6217920">
+                <a:gridCol w="5927154">
                   <a:extLst>
                     <a:ext uri="{9D8B030D-6E8A-4147-A177-3AD203B41FA5}">
                       <a16:colId xmlns:a16="http://schemas.microsoft.com/office/drawing/2014/main" val="20001"/>
@@ -9893,7 +9988,7 @@
                   </a:extLst>
                 </a:gridCol>
               </a:tblGrid>
-              <a:tr h="402336">
+              <a:tr h="266248">
                 <a:tc>
                   <a:txBody>
                     <a:bodyPr/>
@@ -10036,7 +10131,7 @@
                   </a:ext>
                 </a:extLst>
               </a:tr>
-              <a:tr h="402336">
+              <a:tr h="266248">
                 <a:tc>
                   <a:txBody>
                     <a:bodyPr/>
@@ -10179,7 +10274,7 @@
                   </a:ext>
                 </a:extLst>
               </a:tr>
-              <a:tr h="402336">
+              <a:tr h="266248">
                 <a:tc>
                   <a:txBody>
                     <a:bodyPr/>
@@ -10322,7 +10417,7 @@
                   </a:ext>
                 </a:extLst>
               </a:tr>
-              <a:tr h="402336">
+              <a:tr h="266248">
                 <a:tc>
                   <a:txBody>
                     <a:bodyPr/>
@@ -10465,7 +10560,7 @@
                   </a:ext>
                 </a:extLst>
               </a:tr>
-              <a:tr h="402336">
+              <a:tr h="266248">
                 <a:tc>
                   <a:txBody>
                     <a:bodyPr/>
@@ -10608,7 +10703,7 @@
                   </a:ext>
                 </a:extLst>
               </a:tr>
-              <a:tr h="402336">
+              <a:tr h="266248">
                 <a:tc>
                   <a:txBody>
                     <a:bodyPr/>
@@ -10794,6 +10889,66 @@
           </a:p>
         </p:txBody>
       </p:sp>
+      <p:pic>
+        <p:nvPicPr>
+          <p:cNvPr id="6" name="Picture 5">
+            <a:extLst>
+              <a:ext uri="{FF2B5EF4-FFF2-40B4-BE49-F238E27FC236}">
+                <a16:creationId xmlns:a16="http://schemas.microsoft.com/office/drawing/2014/main" id="{33DCBB0E-7783-648E-9B01-F29738D48DEC}"/>
+              </a:ext>
+            </a:extLst>
+          </p:cNvPr>
+          <p:cNvPicPr>
+            <a:picLocks noChangeAspect="1"/>
+          </p:cNvPicPr>
+          <p:nvPr/>
+        </p:nvPicPr>
+        <p:blipFill>
+          <a:blip r:embed="rId3"/>
+          <a:stretch>
+            <a:fillRect/>
+          </a:stretch>
+        </p:blipFill>
+        <p:spPr>
+          <a:xfrm>
+            <a:off x="8088352" y="4332252"/>
+            <a:ext cx="959334" cy="811248"/>
+          </a:xfrm>
+          <a:prstGeom prst="rect">
+            <a:avLst/>
+          </a:prstGeom>
+        </p:spPr>
+      </p:pic>
+      <p:pic>
+        <p:nvPicPr>
+          <p:cNvPr id="8" name="Picture 7">
+            <a:extLst>
+              <a:ext uri="{FF2B5EF4-FFF2-40B4-BE49-F238E27FC236}">
+                <a16:creationId xmlns:a16="http://schemas.microsoft.com/office/drawing/2014/main" id="{E2B1D8F1-A4D4-C191-67B8-1D0CCDF5C4A6}"/>
+              </a:ext>
+            </a:extLst>
+          </p:cNvPr>
+          <p:cNvPicPr>
+            <a:picLocks noChangeAspect="1"/>
+          </p:cNvPicPr>
+          <p:nvPr/>
+        </p:nvPicPr>
+        <p:blipFill>
+          <a:blip r:embed="rId3"/>
+          <a:stretch>
+            <a:fillRect/>
+          </a:stretch>
+        </p:blipFill>
+        <p:spPr>
+          <a:xfrm>
+            <a:off x="7795562" y="4084657"/>
+            <a:ext cx="1252124" cy="1058843"/>
+          </a:xfrm>
+          <a:prstGeom prst="rect">
+            <a:avLst/>
+          </a:prstGeom>
+        </p:spPr>
+      </p:pic>
     </p:spTree>
   </p:cSld>
   <p:clrMapOvr>
